--- a/classes/parte-9-forense-digital-y-respuesta-a-incidentes/203-adquisicion-forense-discos-e-imagenes/clase-203-presentacion.pptx
+++ b/classes/parte-9-forense-digital-y-respuesta-a-incidentes/203-adquisicion-forense-discos-e-imagenes/clase-203-presentacion.pptx
@@ -17,6 +17,11 @@
     <p:sldId id="265" r:id="rId16"/>
     <p:sldId id="266" r:id="rId17"/>
     <p:sldId id="267" r:id="rId18"/>
+    <p:sldId id="268" r:id="rId19"/>
+    <p:sldId id="269" r:id="rId20"/>
+    <p:sldId id="270" r:id="rId21"/>
+    <p:sldId id="271" r:id="rId22"/>
+    <p:sldId id="272" r:id="rId23"/>
   </p:sldIdLst>
   <p:sldSz cx="9144000" cy="6858000" type="screen4x3"/>
   <p:notesSz cx="6858000" cy="9144000"/>
@@ -3198,7 +3203,7 @@
                   <a:srgbClr val="0B3D2E"/>
                 </a:solidFill>
               </a:rPr>
-              <a:t>⚠️ Errores comunes</a:t>
+              <a:t>🧰 Herramientas y preparación</a:t>
             </a:r>
           </a:p>
         </p:txBody>
@@ -3236,67 +3241,52 @@
                   <a:srgbClr val="22282E"/>
                 </a:solidFill>
               </a:rPr>
-              <a:t>•  El SO monta el disco automáticamente — Automount activo alteró tiempos de acceso. Desactiva automount o usa write-blocker antes de conectar.</a:t>
-            </a:r>
-          </a:p>
-          <a:p>
-            <a:pPr>
-              <a:spcAft>
-                <a:spcPts val="600"/>
-              </a:spcAft>
-            </a:pPr>
-            <a:r>
-              <a:rPr sz="1500">
-                <a:solidFill>
-                  <a:srgbClr val="22282E"/>
-                </a:solidFill>
-              </a:rPr>
-              <a:t>•  dd sin bs tarda horas — Bloque por defecto minúsculo. Usa bs=4M.</a:t>
-            </a:r>
-          </a:p>
-          <a:p>
-            <a:pPr>
-              <a:spcAft>
-                <a:spcPts val="600"/>
-              </a:spcAft>
-            </a:pPr>
-            <a:r>
-              <a:rPr sz="1500">
-                <a:solidFill>
-                  <a:srgbClr val="22282E"/>
-                </a:solidFill>
-              </a:rPr>
-              <a:t>•  Hash de adquisición ≠ verificación — El original cambió o hubo error de lectura. Repite con bloqueo de escritura.</a:t>
-            </a:r>
-          </a:p>
-          <a:p>
-            <a:pPr>
-              <a:spcAft>
-                <a:spcPts val="600"/>
-              </a:spcAft>
-            </a:pPr>
-            <a:r>
-              <a:rPr sz="1500">
-                <a:solidFill>
-                  <a:srgbClr val="22282E"/>
-                </a:solidFill>
-              </a:rPr>
-              <a:t>•  Imagen RAW enorme — RAW no comprime. Usa E01 si el espacio importa.</a:t>
-            </a:r>
-          </a:p>
-          <a:p>
-            <a:pPr>
-              <a:spcAft>
-                <a:spcPts val="600"/>
-              </a:spcAft>
-            </a:pPr>
-            <a:r>
-              <a:rPr sz="1500">
-                <a:solidFill>
-                  <a:srgbClr val="22282E"/>
-                </a:solidFill>
-              </a:rPr>
-              <a:t>•  ewfacquire: permission denied — Falta privilegio de lectura del dispositivo. Ejecuta con sudo.</a:t>
+              <a:t>•  Linux: dd, dcfldd, ewfacquire (paquete libewf-tools), hashdeep.</a:t>
+            </a:r>
+          </a:p>
+          <a:p>
+            <a:pPr>
+              <a:spcAft>
+                <a:spcPts val="600"/>
+              </a:spcAft>
+            </a:pPr>
+            <a:r>
+              <a:rPr sz="1500">
+                <a:solidFill>
+                  <a:srgbClr val="22282E"/>
+                </a:solidFill>
+              </a:rPr>
+              <a:t>•  Windows: FTK Imager (gratuito, de Exterro/AccessData) para crear imágenes E01 con verificación.</a:t>
+            </a:r>
+          </a:p>
+          <a:p>
+            <a:pPr>
+              <a:spcAft>
+                <a:spcPts val="600"/>
+              </a:spcAft>
+            </a:pPr>
+            <a:r>
+              <a:rPr sz="1500">
+                <a:solidFill>
+                  <a:srgbClr val="22282E"/>
+                </a:solidFill>
+              </a:rPr>
+              <a:t>•  Hardware simulado: usa un pendrive propio o un archivo .img como "disco". Nunca practiques sobre medios de terceros sin autorización.</a:t>
+            </a:r>
+          </a:p>
+          <a:p>
+            <a:pPr>
+              <a:spcAft>
+                <a:spcPts val="600"/>
+              </a:spcAft>
+            </a:pPr>
+            <a:r>
+              <a:rPr sz="1500">
+                <a:solidFill>
+                  <a:srgbClr val="22282E"/>
+                </a:solidFill>
+              </a:rPr>
+              <a:t>•  Recuerda: laboratorio aislado, evidencia propia, y bloqueo de escritura siempre que toques un original.</a:t>
             </a:r>
           </a:p>
         </p:txBody>
@@ -3347,7 +3337,7 @@
                   <a:srgbClr val="0B3D2E"/>
                 </a:solidFill>
               </a:rPr>
-              <a:t>❓ Preguntas frecuentes</a:t>
+              <a:t>🧪 Laboratorio guiado</a:t>
             </a:r>
           </a:p>
         </p:txBody>
@@ -3385,97 +3375,97 @@
                   <a:srgbClr val="22282E"/>
                 </a:solidFill>
               </a:rPr>
-              <a:t>•  ❓ ¿RAW o E01?</a:t>
-            </a:r>
-          </a:p>
-          <a:p>
-            <a:pPr>
-              <a:spcAft>
-                <a:spcPts val="600"/>
-              </a:spcAft>
-            </a:pPr>
-            <a:r>
-              <a:rPr sz="1500">
-                <a:solidFill>
-                  <a:srgbClr val="22282E"/>
-                </a:solidFill>
-              </a:rPr>
-              <a:t>•  E01 para casos formales (metadatos + integridad integrada); RAW para máxima compatibilidad con herramientas.</a:t>
-            </a:r>
-          </a:p>
-          <a:p>
-            <a:pPr>
-              <a:spcAft>
-                <a:spcPts val="600"/>
-              </a:spcAft>
-            </a:pPr>
-            <a:r>
-              <a:rPr sz="1500">
-                <a:solidFill>
-                  <a:srgbClr val="22282E"/>
-                </a:solidFill>
-              </a:rPr>
-              <a:t>•  ❓ ¿Puedo adquirir un equipo encendido?</a:t>
-            </a:r>
-          </a:p>
-          <a:p>
-            <a:pPr>
-              <a:spcAft>
-                <a:spcPts val="600"/>
-              </a:spcAft>
-            </a:pPr>
-            <a:r>
-              <a:rPr sz="1500">
-                <a:solidFill>
-                  <a:srgbClr val="22282E"/>
-                </a:solidFill>
-              </a:rPr>
-              <a:t>•  Sí, es adquisición en vivo. Captura primero la RAM (más volátil) y documenta que el sistema estaba activo.</a:t>
-            </a:r>
-          </a:p>
-          <a:p>
-            <a:pPr>
-              <a:spcAft>
-                <a:spcPts val="600"/>
-              </a:spcAft>
-            </a:pPr>
-            <a:r>
-              <a:rPr sz="1500">
-                <a:solidFill>
-                  <a:srgbClr val="22282E"/>
-                </a:solidFill>
-              </a:rPr>
-              <a:t>•  ❓ ¿El bloqueo por software basta?</a:t>
-            </a:r>
-          </a:p>
-          <a:p>
-            <a:pPr>
-              <a:spcAft>
-                <a:spcPts val="600"/>
-              </a:spcAft>
-            </a:pPr>
-            <a:r>
-              <a:rPr sz="1500">
-                <a:solidFill>
-                  <a:srgbClr val="22282E"/>
-                </a:solidFill>
-              </a:rPr>
-              <a:t>•  Para prácticas sí; en casos legales serios se prefiere un write-blocker de hardware certificado.</a:t>
-            </a:r>
-          </a:p>
-          <a:p>
-            <a:pPr>
-              <a:spcAft>
-                <a:spcPts val="600"/>
-              </a:spcAft>
-            </a:pPr>
-            <a:r>
-              <a:rPr sz="1500">
-                <a:solidFill>
-                  <a:srgbClr val="22282E"/>
-                </a:solidFill>
-              </a:rPr>
-              <a:t>•  ❓ ¿Por qué mi SSD no recupera borrados?</a:t>
+              <a:t>•  Identifica el dispositivo (en Linux) sin montarlo:</a:t>
+            </a:r>
+          </a:p>
+          <a:p>
+            <a:pPr>
+              <a:spcAft>
+                <a:spcPts val="600"/>
+              </a:spcAft>
+            </a:pPr>
+            <a:r>
+              <a:rPr sz="1500">
+                <a:solidFill>
+                  <a:srgbClr val="22282E"/>
+                </a:solidFill>
+              </a:rPr>
+              <a:t>•  Monta el original en solo lectura si necesitas inspeccionarlo (simula write-blocker por software):</a:t>
+            </a:r>
+          </a:p>
+          <a:p>
+            <a:pPr>
+              <a:spcAft>
+                <a:spcPts val="600"/>
+              </a:spcAft>
+            </a:pPr>
+            <a:r>
+              <a:rPr sz="1500">
+                <a:solidFill>
+                  <a:srgbClr val="22282E"/>
+                </a:solidFill>
+              </a:rPr>
+              <a:t>•  Adquiere con dcfldd calculando hash al vuelo:</a:t>
+            </a:r>
+          </a:p>
+          <a:p>
+            <a:pPr>
+              <a:spcAft>
+                <a:spcPts val="600"/>
+              </a:spcAft>
+            </a:pPr>
+            <a:r>
+              <a:rPr sz="1500">
+                <a:solidFill>
+                  <a:srgbClr val="22282E"/>
+                </a:solidFill>
+              </a:rPr>
+              <a:t>•  Alternativa en formato forense E01:</a:t>
+            </a:r>
+          </a:p>
+          <a:p>
+            <a:pPr>
+              <a:spcAft>
+                <a:spcPts val="600"/>
+              </a:spcAft>
+            </a:pPr>
+            <a:r>
+              <a:rPr sz="1500">
+                <a:solidFill>
+                  <a:srgbClr val="22282E"/>
+                </a:solidFill>
+              </a:rPr>
+              <a:t>•  Rellena caso, examinador y notas cuando lo pida.</a:t>
+            </a:r>
+          </a:p>
+          <a:p>
+            <a:pPr>
+              <a:spcAft>
+                <a:spcPts val="600"/>
+              </a:spcAft>
+            </a:pPr>
+            <a:r>
+              <a:rPr sz="1500">
+                <a:solidFill>
+                  <a:srgbClr val="22282E"/>
+                </a:solidFill>
+              </a:rPr>
+              <a:t>•  Verifica la imagen RAW contra el original:</a:t>
+            </a:r>
+          </a:p>
+          <a:p>
+            <a:pPr>
+              <a:spcAft>
+                <a:spcPts val="600"/>
+              </a:spcAft>
+            </a:pPr>
+            <a:r>
+              <a:rPr sz="1500">
+                <a:solidFill>
+                  <a:srgbClr val="22282E"/>
+                </a:solidFill>
+              </a:rPr>
+              <a:t>•  Verifica una imagen E01:</a:t>
             </a:r>
           </a:p>
         </p:txBody>
@@ -3526,7 +3516,7 @@
                   <a:srgbClr val="0B3D2E"/>
                 </a:solidFill>
               </a:rPr>
-              <a:t>🔗 Referencias</a:t>
+              <a:t>✍️ Ejercicios</a:t>
             </a:r>
           </a:p>
         </p:txBody>
@@ -3564,56 +3554,757 @@
                   <a:srgbClr val="22282E"/>
                 </a:solidFill>
               </a:rPr>
-              <a:t>•  Carrier, B. — File System Forensic Analysis, Addison-Wesley 2005.</a:t>
-            </a:r>
-          </a:p>
-          <a:p>
-            <a:pPr>
-              <a:spcAft>
-                <a:spcPts val="600"/>
-              </a:spcAft>
-            </a:pPr>
-            <a:r>
-              <a:rPr sz="1500">
-                <a:solidFill>
-                  <a:srgbClr val="22282E"/>
-                </a:solidFill>
-              </a:rPr>
-              <a:t>•  NIST SP 800-86: &lt;https://csrc.nist.gov/publications/detail/sp/800-86/final&gt;</a:t>
-            </a:r>
-          </a:p>
-          <a:p>
-            <a:pPr>
-              <a:spcAft>
-                <a:spcPts val="600"/>
-              </a:spcAft>
-            </a:pPr>
-            <a:r>
-              <a:rPr sz="1500">
-                <a:solidFill>
-                  <a:srgbClr val="22282E"/>
-                </a:solidFill>
-              </a:rPr>
-              <a:t>•  FTK Imager (Exterro): &lt;https://www.exterro.com/ftk-imager&gt;</a:t>
-            </a:r>
-          </a:p>
-          <a:p>
-            <a:pPr>
-              <a:spcAft>
-                <a:spcPts val="600"/>
-              </a:spcAft>
-            </a:pPr>
-            <a:r>
-              <a:rPr sz="1500">
-                <a:solidFill>
-                  <a:srgbClr val="22282E"/>
-                </a:solidFill>
-              </a:rPr>
-              <a:t>•  libewf / ewf-tools: &lt;https://github.com/libyal/libewf&gt;</a:t>
-            </a:r>
-          </a:p>
-        </p:txBody>
-      </p:sp>
+              <a:t>•  Explica cuándo elegirías adquisición lógica en vez de física.</a:t>
+            </a:r>
+          </a:p>
+          <a:p>
+            <a:pPr>
+              <a:spcAft>
+                <a:spcPts val="600"/>
+              </a:spcAft>
+            </a:pPr>
+            <a:r>
+              <a:rPr sz="1500">
+                <a:solidFill>
+                  <a:srgbClr val="22282E"/>
+                </a:solidFill>
+              </a:rPr>
+              <a:t>•  Compara RAW y E01 en una tabla de ventajas/desventajas.</a:t>
+            </a:r>
+          </a:p>
+          <a:p>
+            <a:pPr>
+              <a:spcAft>
+                <a:spcPts val="600"/>
+              </a:spcAft>
+            </a:pPr>
+            <a:r>
+              <a:rPr sz="1500">
+                <a:solidFill>
+                  <a:srgbClr val="22282E"/>
+                </a:solidFill>
+              </a:rPr>
+              <a:t>•  Adquiere un pendrive propio en ambos formatos y compara tamaños.</a:t>
+            </a:r>
+          </a:p>
+          <a:p>
+            <a:pPr>
+              <a:spcAft>
+                <a:spcPts val="600"/>
+              </a:spcAft>
+            </a:pPr>
+            <a:r>
+              <a:rPr sz="1500">
+                <a:solidFill>
+                  <a:srgbClr val="22282E"/>
+                </a:solidFill>
+              </a:rPr>
+              <a:t>•  Investiga cómo un write-blocker de hardware difiere de blockdev --setro.</a:t>
+            </a:r>
+          </a:p>
+          <a:p>
+            <a:pPr>
+              <a:spcAft>
+                <a:spcPts val="600"/>
+              </a:spcAft>
+            </a:pPr>
+            <a:r>
+              <a:rPr sz="1500">
+                <a:solidFill>
+                  <a:srgbClr val="22282E"/>
+                </a:solidFill>
+              </a:rPr>
+              <a:t>•  Explica por qué el TRIM de un SSD complica la recuperación de borrados.</a:t>
+            </a:r>
+          </a:p>
+          <a:p>
+            <a:pPr>
+              <a:spcAft>
+                <a:spcPts val="600"/>
+              </a:spcAft>
+            </a:pPr>
+            <a:r>
+              <a:rPr sz="1500">
+                <a:solidFill>
+                  <a:srgbClr val="22282E"/>
+                </a:solidFill>
+              </a:rPr>
+              <a:t>•  Diseña el procedimiento para adquirir un servidor que no se puede apagar.</a:t>
+            </a:r>
+          </a:p>
+        </p:txBody>
+      </p:sp>
+    </p:spTree>
+  </p:cSld>
+  <p:clrMapOvr>
+    <a:masterClrMapping/>
+  </p:clrMapOvr>
+</p:sld>
+</file>
+
+<file path=ppt/slides/slide13.xml><?xml version="1.0" encoding="utf-8"?>
+<p:sld xmlns:a="http://schemas.openxmlformats.org/drawingml/2006/main" xmlns:p="http://schemas.openxmlformats.org/presentationml/2006/main" xmlns:r="http://schemas.openxmlformats.org/officeDocument/2006/relationships">
+  <p:cSld>
+    <p:spTree>
+      <p:nvGrpSpPr>
+        <p:cNvPr id="1" name=""/>
+        <p:cNvGrpSpPr/>
+        <p:nvPr/>
+      </p:nvGrpSpPr>
+      <p:grpSpPr/>
+      <p:sp>
+        <p:nvSpPr>
+          <p:cNvPr id="2" name="TextBox 1"/>
+          <p:cNvSpPr txBox="1"/>
+          <p:nvPr/>
+        </p:nvSpPr>
+        <p:spPr>
+          <a:xfrm>
+            <a:off x="457200" y="320040"/>
+            <a:ext cx="8229600" cy="822960"/>
+          </a:xfrm>
+          <a:prstGeom prst="rect">
+            <a:avLst/>
+          </a:prstGeom>
+          <a:noFill/>
+        </p:spPr>
+        <p:txBody>
+          <a:bodyPr wrap="square">
+            <a:spAutoFit/>
+          </a:bodyPr>
+          <a:lstStyle/>
+          <a:p>
+            <a:r>
+              <a:rPr sz="2600" b="1">
+                <a:solidFill>
+                  <a:srgbClr val="0B3D2E"/>
+                </a:solidFill>
+              </a:rPr>
+              <a:t>📝 Reto verificable</a:t>
+            </a:r>
+          </a:p>
+        </p:txBody>
+      </p:sp>
+      <p:sp>
+        <p:nvSpPr>
+          <p:cNvPr id="3" name="TextBox 2"/>
+          <p:cNvSpPr txBox="1"/>
+          <p:nvPr/>
+        </p:nvSpPr>
+        <p:spPr>
+          <a:xfrm>
+            <a:off x="457200" y="1280160"/>
+            <a:ext cx="8229600" cy="4937760"/>
+          </a:xfrm>
+          <a:prstGeom prst="rect">
+            <a:avLst/>
+          </a:prstGeom>
+          <a:noFill/>
+        </p:spPr>
+        <p:txBody>
+          <a:bodyPr wrap="square">
+            <a:spAutoFit/>
+          </a:bodyPr>
+          <a:lstStyle/>
+          <a:p>
+            <a:pPr>
+              <a:spcAft>
+                <a:spcPts val="600"/>
+              </a:spcAft>
+            </a:pPr>
+            <a:r>
+              <a:rPr sz="1500">
+                <a:solidFill>
+                  <a:srgbClr val="22282E"/>
+                </a:solidFill>
+              </a:rPr>
+              <a:t>•  Adquiere una imagen forense de un pendrive propio en formato E01 con FTK Imager o ewfacquire, y demuestra que la imagen es fiel al original comparando hashes.</a:t>
+            </a:r>
+          </a:p>
+          <a:p>
+            <a:pPr>
+              <a:spcAft>
+                <a:spcPts val="600"/>
+              </a:spcAft>
+            </a:pPr>
+            <a:r>
+              <a:rPr sz="1500">
+                <a:solidFill>
+                  <a:srgbClr val="22282E"/>
+                </a:solidFill>
+              </a:rPr>
+              <a:t>•  Criterio de aceptación: entregas la imagen E01, el log de adquisición y la salida de ewfverify (o el reporte de FTK) mostrando que el hash de adquisición coincide con el de verificación. La cadena de…</a:t>
+            </a:r>
+          </a:p>
+        </p:txBody>
+      </p:sp>
+    </p:spTree>
+  </p:cSld>
+  <p:clrMapOvr>
+    <a:masterClrMapping/>
+  </p:clrMapOvr>
+</p:sld>
+</file>
+
+<file path=ppt/slides/slide14.xml><?xml version="1.0" encoding="utf-8"?>
+<p:sld xmlns:a="http://schemas.openxmlformats.org/drawingml/2006/main" xmlns:p="http://schemas.openxmlformats.org/presentationml/2006/main" xmlns:r="http://schemas.openxmlformats.org/officeDocument/2006/relationships">
+  <p:cSld>
+    <p:spTree>
+      <p:nvGrpSpPr>
+        <p:cNvPr id="1" name=""/>
+        <p:cNvGrpSpPr/>
+        <p:nvPr/>
+      </p:nvGrpSpPr>
+      <p:grpSpPr/>
+      <p:sp>
+        <p:nvSpPr>
+          <p:cNvPr id="2" name="TextBox 1"/>
+          <p:cNvSpPr txBox="1"/>
+          <p:nvPr/>
+        </p:nvSpPr>
+        <p:spPr>
+          <a:xfrm>
+            <a:off x="457200" y="320040"/>
+            <a:ext cx="8229600" cy="822960"/>
+          </a:xfrm>
+          <a:prstGeom prst="rect">
+            <a:avLst/>
+          </a:prstGeom>
+          <a:noFill/>
+        </p:spPr>
+        <p:txBody>
+          <a:bodyPr wrap="square">
+            <a:spAutoFit/>
+          </a:bodyPr>
+          <a:lstStyle/>
+          <a:p>
+            <a:r>
+              <a:rPr sz="2600" b="1">
+                <a:solidFill>
+                  <a:srgbClr val="0B3D2E"/>
+                </a:solidFill>
+              </a:rPr>
+              <a:t>⚠️ Errores comunes</a:t>
+            </a:r>
+          </a:p>
+        </p:txBody>
+      </p:sp>
+      <p:sp>
+        <p:nvSpPr>
+          <p:cNvPr id="3" name="TextBox 2"/>
+          <p:cNvSpPr txBox="1"/>
+          <p:nvPr/>
+        </p:nvSpPr>
+        <p:spPr>
+          <a:xfrm>
+            <a:off x="457200" y="1280160"/>
+            <a:ext cx="8229600" cy="4937760"/>
+          </a:xfrm>
+          <a:prstGeom prst="rect">
+            <a:avLst/>
+          </a:prstGeom>
+          <a:noFill/>
+        </p:spPr>
+        <p:txBody>
+          <a:bodyPr wrap="square">
+            <a:spAutoFit/>
+          </a:bodyPr>
+          <a:lstStyle/>
+          <a:p>
+            <a:pPr>
+              <a:spcAft>
+                <a:spcPts val="600"/>
+              </a:spcAft>
+            </a:pPr>
+            <a:r>
+              <a:rPr sz="1500">
+                <a:solidFill>
+                  <a:srgbClr val="22282E"/>
+                </a:solidFill>
+              </a:rPr>
+              <a:t>•  El SO monta el disco automáticamente — Automount activo alteró tiempos de acceso. Desactiva automount o usa write-blocker antes de conectar.</a:t>
+            </a:r>
+          </a:p>
+          <a:p>
+            <a:pPr>
+              <a:spcAft>
+                <a:spcPts val="600"/>
+              </a:spcAft>
+            </a:pPr>
+            <a:r>
+              <a:rPr sz="1500">
+                <a:solidFill>
+                  <a:srgbClr val="22282E"/>
+                </a:solidFill>
+              </a:rPr>
+              <a:t>•  dd sin bs tarda horas — Bloque por defecto minúsculo. Usa bs=4M.</a:t>
+            </a:r>
+          </a:p>
+          <a:p>
+            <a:pPr>
+              <a:spcAft>
+                <a:spcPts val="600"/>
+              </a:spcAft>
+            </a:pPr>
+            <a:r>
+              <a:rPr sz="1500">
+                <a:solidFill>
+                  <a:srgbClr val="22282E"/>
+                </a:solidFill>
+              </a:rPr>
+              <a:t>•  Hash de adquisición ≠ verificación — El original cambió o hubo error de lectura. Repite con bloqueo de escritura.</a:t>
+            </a:r>
+          </a:p>
+          <a:p>
+            <a:pPr>
+              <a:spcAft>
+                <a:spcPts val="600"/>
+              </a:spcAft>
+            </a:pPr>
+            <a:r>
+              <a:rPr sz="1500">
+                <a:solidFill>
+                  <a:srgbClr val="22282E"/>
+                </a:solidFill>
+              </a:rPr>
+              <a:t>•  Imagen RAW enorme — RAW no comprime. Usa E01 si el espacio importa.</a:t>
+            </a:r>
+          </a:p>
+          <a:p>
+            <a:pPr>
+              <a:spcAft>
+                <a:spcPts val="600"/>
+              </a:spcAft>
+            </a:pPr>
+            <a:r>
+              <a:rPr sz="1500">
+                <a:solidFill>
+                  <a:srgbClr val="22282E"/>
+                </a:solidFill>
+              </a:rPr>
+              <a:t>•  ewfacquire: permission denied — Falta privilegio de lectura del dispositivo. Ejecuta con sudo.</a:t>
+            </a:r>
+          </a:p>
+        </p:txBody>
+      </p:sp>
+    </p:spTree>
+  </p:cSld>
+  <p:clrMapOvr>
+    <a:masterClrMapping/>
+  </p:clrMapOvr>
+</p:sld>
+</file>
+
+<file path=ppt/slides/slide15.xml><?xml version="1.0" encoding="utf-8"?>
+<p:sld xmlns:a="http://schemas.openxmlformats.org/drawingml/2006/main" xmlns:p="http://schemas.openxmlformats.org/presentationml/2006/main" xmlns:r="http://schemas.openxmlformats.org/officeDocument/2006/relationships">
+  <p:cSld>
+    <p:spTree>
+      <p:nvGrpSpPr>
+        <p:cNvPr id="1" name=""/>
+        <p:cNvGrpSpPr/>
+        <p:nvPr/>
+      </p:nvGrpSpPr>
+      <p:grpSpPr/>
+      <p:sp>
+        <p:nvSpPr>
+          <p:cNvPr id="2" name="TextBox 1"/>
+          <p:cNvSpPr txBox="1"/>
+          <p:nvPr/>
+        </p:nvSpPr>
+        <p:spPr>
+          <a:xfrm>
+            <a:off x="457200" y="320040"/>
+            <a:ext cx="8229600" cy="822960"/>
+          </a:xfrm>
+          <a:prstGeom prst="rect">
+            <a:avLst/>
+          </a:prstGeom>
+          <a:noFill/>
+        </p:spPr>
+        <p:txBody>
+          <a:bodyPr wrap="square">
+            <a:spAutoFit/>
+          </a:bodyPr>
+          <a:lstStyle/>
+          <a:p>
+            <a:r>
+              <a:rPr sz="2600" b="1">
+                <a:solidFill>
+                  <a:srgbClr val="0B3D2E"/>
+                </a:solidFill>
+              </a:rPr>
+              <a:t>❓ Preguntas frecuentes</a:t>
+            </a:r>
+          </a:p>
+        </p:txBody>
+      </p:sp>
+      <p:sp>
+        <p:nvSpPr>
+          <p:cNvPr id="3" name="TextBox 2"/>
+          <p:cNvSpPr txBox="1"/>
+          <p:nvPr/>
+        </p:nvSpPr>
+        <p:spPr>
+          <a:xfrm>
+            <a:off x="457200" y="1280160"/>
+            <a:ext cx="8229600" cy="4937760"/>
+          </a:xfrm>
+          <a:prstGeom prst="rect">
+            <a:avLst/>
+          </a:prstGeom>
+          <a:noFill/>
+        </p:spPr>
+        <p:txBody>
+          <a:bodyPr wrap="square">
+            <a:spAutoFit/>
+          </a:bodyPr>
+          <a:lstStyle/>
+          <a:p>
+            <a:pPr>
+              <a:spcAft>
+                <a:spcPts val="600"/>
+              </a:spcAft>
+            </a:pPr>
+            <a:r>
+              <a:rPr sz="1500">
+                <a:solidFill>
+                  <a:srgbClr val="22282E"/>
+                </a:solidFill>
+              </a:rPr>
+              <a:t>•  ❓ ¿RAW o E01?</a:t>
+            </a:r>
+          </a:p>
+          <a:p>
+            <a:pPr>
+              <a:spcAft>
+                <a:spcPts val="600"/>
+              </a:spcAft>
+            </a:pPr>
+            <a:r>
+              <a:rPr sz="1500">
+                <a:solidFill>
+                  <a:srgbClr val="22282E"/>
+                </a:solidFill>
+              </a:rPr>
+              <a:t>•  E01 para casos formales (metadatos + integridad integrada); RAW para máxima compatibilidad con herramientas.</a:t>
+            </a:r>
+          </a:p>
+          <a:p>
+            <a:pPr>
+              <a:spcAft>
+                <a:spcPts val="600"/>
+              </a:spcAft>
+            </a:pPr>
+            <a:r>
+              <a:rPr sz="1500">
+                <a:solidFill>
+                  <a:srgbClr val="22282E"/>
+                </a:solidFill>
+              </a:rPr>
+              <a:t>•  ❓ ¿Puedo adquirir un equipo encendido?</a:t>
+            </a:r>
+          </a:p>
+          <a:p>
+            <a:pPr>
+              <a:spcAft>
+                <a:spcPts val="600"/>
+              </a:spcAft>
+            </a:pPr>
+            <a:r>
+              <a:rPr sz="1500">
+                <a:solidFill>
+                  <a:srgbClr val="22282E"/>
+                </a:solidFill>
+              </a:rPr>
+              <a:t>•  Sí, es adquisición en vivo. Captura primero la RAM (más volátil) y documenta que el sistema estaba activo.</a:t>
+            </a:r>
+          </a:p>
+          <a:p>
+            <a:pPr>
+              <a:spcAft>
+                <a:spcPts val="600"/>
+              </a:spcAft>
+            </a:pPr>
+            <a:r>
+              <a:rPr sz="1500">
+                <a:solidFill>
+                  <a:srgbClr val="22282E"/>
+                </a:solidFill>
+              </a:rPr>
+              <a:t>•  ❓ ¿El bloqueo por software basta?</a:t>
+            </a:r>
+          </a:p>
+          <a:p>
+            <a:pPr>
+              <a:spcAft>
+                <a:spcPts val="600"/>
+              </a:spcAft>
+            </a:pPr>
+            <a:r>
+              <a:rPr sz="1500">
+                <a:solidFill>
+                  <a:srgbClr val="22282E"/>
+                </a:solidFill>
+              </a:rPr>
+              <a:t>•  Para prácticas sí; en casos legales serios se prefiere un write-blocker de hardware certificado.</a:t>
+            </a:r>
+          </a:p>
+          <a:p>
+            <a:pPr>
+              <a:spcAft>
+                <a:spcPts val="600"/>
+              </a:spcAft>
+            </a:pPr>
+            <a:r>
+              <a:rPr sz="1500">
+                <a:solidFill>
+                  <a:srgbClr val="22282E"/>
+                </a:solidFill>
+              </a:rPr>
+              <a:t>•  ❓ ¿Por qué mi SSD no recupera borrados?</a:t>
+            </a:r>
+          </a:p>
+        </p:txBody>
+      </p:sp>
+    </p:spTree>
+  </p:cSld>
+  <p:clrMapOvr>
+    <a:masterClrMapping/>
+  </p:clrMapOvr>
+</p:sld>
+</file>
+
+<file path=ppt/slides/slide16.xml><?xml version="1.0" encoding="utf-8"?>
+<p:sld xmlns:a="http://schemas.openxmlformats.org/drawingml/2006/main" xmlns:p="http://schemas.openxmlformats.org/presentationml/2006/main" xmlns:r="http://schemas.openxmlformats.org/officeDocument/2006/relationships">
+  <p:cSld>
+    <p:spTree>
+      <p:nvGrpSpPr>
+        <p:cNvPr id="1" name=""/>
+        <p:cNvGrpSpPr/>
+        <p:nvPr/>
+      </p:nvGrpSpPr>
+      <p:grpSpPr/>
+      <p:sp>
+        <p:nvSpPr>
+          <p:cNvPr id="2" name="TextBox 1"/>
+          <p:cNvSpPr txBox="1"/>
+          <p:nvPr/>
+        </p:nvSpPr>
+        <p:spPr>
+          <a:xfrm>
+            <a:off x="457200" y="320040"/>
+            <a:ext cx="8229600" cy="822960"/>
+          </a:xfrm>
+          <a:prstGeom prst="rect">
+            <a:avLst/>
+          </a:prstGeom>
+          <a:noFill/>
+        </p:spPr>
+        <p:txBody>
+          <a:bodyPr wrap="square">
+            <a:spAutoFit/>
+          </a:bodyPr>
+          <a:lstStyle/>
+          <a:p>
+            <a:r>
+              <a:rPr sz="2600" b="1">
+                <a:solidFill>
+                  <a:srgbClr val="0B3D2E"/>
+                </a:solidFill>
+              </a:rPr>
+              <a:t>🔗 Referencias verificables y alcance</a:t>
+            </a:r>
+          </a:p>
+        </p:txBody>
+      </p:sp>
+      <p:sp>
+        <p:nvSpPr>
+          <p:cNvPr id="3" name="TextBox 2"/>
+          <p:cNvSpPr txBox="1"/>
+          <p:nvPr/>
+        </p:nvSpPr>
+        <p:spPr>
+          <a:xfrm>
+            <a:off x="457200" y="1280160"/>
+            <a:ext cx="8229600" cy="4937760"/>
+          </a:xfrm>
+          <a:prstGeom prst="rect">
+            <a:avLst/>
+          </a:prstGeom>
+          <a:noFill/>
+        </p:spPr>
+        <p:txBody>
+          <a:bodyPr wrap="square">
+            <a:spAutoFit/>
+          </a:bodyPr>
+          <a:lstStyle/>
+          <a:p>
+            <a:pPr>
+              <a:spcAft>
+                <a:spcPts val="600"/>
+              </a:spcAft>
+            </a:pPr>
+            <a:r>
+              <a:rPr sz="1500">
+                <a:solidFill>
+                  <a:srgbClr val="22282E"/>
+                </a:solidFill>
+              </a:rPr>
+              <a:t>•  NIST SP 800-86: fuente primaria para seleccionar y documentar adquisición según necesidad de respuesta y forense — &lt;https://doi.org/10.6028/NIST.SP.800-86&gt;</a:t>
+            </a:r>
+          </a:p>
+          <a:p>
+            <a:pPr>
+              <a:spcAft>
+                <a:spcPts val="600"/>
+              </a:spcAft>
+            </a:pPr>
+            <a:r>
+              <a:rPr sz="1500">
+                <a:solidFill>
+                  <a:srgbClr val="22282E"/>
+                </a:solidFill>
+              </a:rPr>
+              <a:t>•  RFC 3227: fuente primaria para orden de volatilidad, copias bit a bit, checksums y análisis sobre copia — &lt;https://www.rfc-editor.org/info/rfc3227/&gt;</a:t>
+            </a:r>
+          </a:p>
+          <a:p>
+            <a:pPr>
+              <a:spcAft>
+                <a:spcPts val="600"/>
+              </a:spcAft>
+            </a:pPr>
+            <a:r>
+              <a:rPr sz="1500">
+                <a:solidFill>
+                  <a:srgbClr val="22282E"/>
+                </a:solidFill>
+              </a:rPr>
+              <a:t>•  NIST Computer Forensics Tool Testing: proyecto primario de requisitos y pruebas; los resultados aplican a versiones y configuraciones ensayadas —…</a:t>
+            </a:r>
+          </a:p>
+          <a:p>
+            <a:pPr>
+              <a:spcAft>
+                <a:spcPts val="600"/>
+              </a:spcAft>
+            </a:pPr>
+            <a:r>
+              <a:rPr sz="1500">
+                <a:solidFill>
+                  <a:srgbClr val="22282E"/>
+                </a:solidFill>
+              </a:rPr>
+              <a:t>•  libewf: implementación primaria abierta de formatos EWF y herramientas como ewfacquire — &lt;https://github.com/libyal/libewf&gt;</a:t>
+            </a:r>
+          </a:p>
+          <a:p>
+            <a:pPr>
+              <a:spcAft>
+                <a:spcPts val="600"/>
+              </a:spcAft>
+            </a:pPr>
+            <a:r>
+              <a:rPr sz="1500">
+                <a:solidFill>
+                  <a:srgbClr val="22282E"/>
+                </a:solidFill>
+              </a:rPr>
+              <a:t>•  FTK Imager: documentación del proveedor para funciones de adquisición; no sustituye validación independiente del método — &lt;https://www.exterro.com/ftk-product-downloads/ftk-imager-version-4-7-3&gt;</a:t>
+            </a:r>
+          </a:p>
+          <a:p>
+            <a:pPr>
+              <a:spcAft>
+                <a:spcPts val="600"/>
+              </a:spcAft>
+            </a:pPr>
+            <a:r>
+              <a:rPr sz="1500">
+                <a:solidFill>
+                  <a:srgbClr val="22282E"/>
+                </a:solidFill>
+              </a:rPr>
+              <a:t>•  Carrier, B. File System Forensic Analysis. Addison-Wesley: bibliografía complementaria.</a:t>
+            </a:r>
+          </a:p>
+        </p:txBody>
+      </p:sp>
+    </p:spTree>
+  </p:cSld>
+  <p:clrMapOvr>
+    <a:masterClrMapping/>
+  </p:clrMapOvr>
+</p:sld>
+</file>
+
+<file path=ppt/slides/slide17.xml><?xml version="1.0" encoding="utf-8"?>
+<p:sld xmlns:a="http://schemas.openxmlformats.org/drawingml/2006/main" xmlns:p="http://schemas.openxmlformats.org/presentationml/2006/main" xmlns:r="http://schemas.openxmlformats.org/officeDocument/2006/relationships">
+  <p:cSld>
+    <p:spTree>
+      <p:nvGrpSpPr>
+        <p:cNvPr id="1" name=""/>
+        <p:cNvGrpSpPr/>
+        <p:nvPr/>
+      </p:nvGrpSpPr>
+      <p:grpSpPr/>
+      <p:sp>
+        <p:nvSpPr>
+          <p:cNvPr id="2" name="TextBox 1"/>
+          <p:cNvSpPr txBox="1"/>
+          <p:nvPr/>
+        </p:nvSpPr>
+        <p:spPr>
+          <a:xfrm>
+            <a:off x="457200" y="274320"/>
+            <a:ext cx="8229600" cy="640080"/>
+          </a:xfrm>
+          <a:prstGeom prst="rect">
+            <a:avLst/>
+          </a:prstGeom>
+          <a:noFill/>
+        </p:spPr>
+        <p:txBody>
+          <a:bodyPr wrap="square">
+            <a:spAutoFit/>
+          </a:bodyPr>
+          <a:lstStyle/>
+          <a:p>
+            <a:r>
+              <a:rPr sz="2200" b="1">
+                <a:solidFill>
+                  <a:srgbClr val="0B3D2E"/>
+                </a:solidFill>
+              </a:rPr>
+              <a:t>Diagrama de la clase</a:t>
+            </a:r>
+          </a:p>
+        </p:txBody>
+      </p:sp>
+      <p:pic>
+        <p:nvPicPr>
+          <p:cNvPr id="3" name="Picture 2" descr="b378b66d505ad434.png"/>
+          <p:cNvPicPr>
+            <a:picLocks noChangeAspect="1"/>
+          </p:cNvPicPr>
+          <p:nvPr/>
+        </p:nvPicPr>
+        <p:blipFill>
+          <a:blip r:embed="rId2"/>
+          <a:stretch>
+            <a:fillRect/>
+          </a:stretch>
+        </p:blipFill>
+        <p:spPr>
+          <a:xfrm>
+            <a:off x="457200" y="3259836"/>
+            <a:ext cx="8229600" cy="978408"/>
+          </a:xfrm>
+          <a:prstGeom prst="rect">
+            <a:avLst/>
+          </a:prstGeom>
+        </p:spPr>
+      </p:pic>
     </p:spTree>
   </p:cSld>
   <p:clrMapOvr>
@@ -3698,7 +4389,7 @@
                   <a:srgbClr val="22282E"/>
                 </a:solidFill>
               </a:rPr>
-              <a:t>•  Aprender a adquirir imágenes forenses de discos y memoria de forma verificable y sin alterar el original. Al terminar sabrás elegir entre adquisición física y lógica, usar formatos como RAW (dd) y E01, aplicar bloqueo de escritura y verificar integridad con hashes antes y después.</a:t>
+              <a:t>•  Aprender a adquirir imágenes forenses de discos y memoria de forma verificable y sin alterar el original. Al terminar sabrás elegir entre adquisición física y lógica, usar formatos como RAW (dd) y…</a:t>
             </a:r>
           </a:p>
         </p:txBody>
@@ -4092,7 +4783,7 @@
                   <a:srgbClr val="0B3D2E"/>
                 </a:solidFill>
               </a:rPr>
-              <a:t>📖 Definiciones y características</a:t>
+              <a:t>🧠 Explicación en profundidad</a:t>
             </a:r>
           </a:p>
         </p:txBody>
@@ -4130,97 +4821,97 @@
                   <a:srgbClr val="22282E"/>
                 </a:solidFill>
               </a:rPr>
-              <a:t>•  Adquisición física: copia bit a bit de todo el medio, incluido espacio no asignado. Característica: recupera datos borrados.</a:t>
-            </a:r>
-          </a:p>
-          <a:p>
-            <a:pPr>
-              <a:spcAft>
-                <a:spcPts val="600"/>
-              </a:spcAft>
-            </a:pPr>
-            <a:r>
-              <a:rPr sz="1500">
-                <a:solidFill>
-                  <a:srgbClr val="22282E"/>
-                </a:solidFill>
-              </a:rPr>
-              <a:t>•  Adquisición lógica: copia de archivos y estructuras vivas. Característica: más rápida pero omite lo borrado.</a:t>
-            </a:r>
-          </a:p>
-          <a:p>
-            <a:pPr>
-              <a:spcAft>
-                <a:spcPts val="600"/>
-              </a:spcAft>
-            </a:pPr>
-            <a:r>
-              <a:rPr sz="1500">
-                <a:solidFill>
-                  <a:srgbClr val="22282E"/>
-                </a:solidFill>
-              </a:rPr>
-              <a:t>•  Formato RAW (dd): copia cruda sin metadatos. Característica: universal pero sin verificación embebida.</a:t>
-            </a:r>
-          </a:p>
-          <a:p>
-            <a:pPr>
-              <a:spcAft>
-                <a:spcPts val="600"/>
-              </a:spcAft>
-            </a:pPr>
-            <a:r>
-              <a:rPr sz="1500">
-                <a:solidFill>
-                  <a:srgbClr val="22282E"/>
-                </a:solidFill>
-              </a:rPr>
-              <a:t>•  Formato E01 (EWF): EnCase Evidence Format con compresión, metadatos del caso y hash integrado. Característica: verifica integridad por sí mismo.</a:t>
-            </a:r>
-          </a:p>
-          <a:p>
-            <a:pPr>
-              <a:spcAft>
-                <a:spcPts val="600"/>
-              </a:spcAft>
-            </a:pPr>
-            <a:r>
-              <a:rPr sz="1500">
-                <a:solidFill>
-                  <a:srgbClr val="22282E"/>
-                </a:solidFill>
-              </a:rPr>
-              <a:t>•  Write blocker: dispositivo que impide escritura en el original. Característica: hardware es el estándar de oro.</a:t>
-            </a:r>
-          </a:p>
-          <a:p>
-            <a:pPr>
-              <a:spcAft>
-                <a:spcPts val="600"/>
-              </a:spcAft>
-            </a:pPr>
-            <a:r>
-              <a:rPr sz="1500">
-                <a:solidFill>
-                  <a:srgbClr val="22282E"/>
-                </a:solidFill>
-              </a:rPr>
-              <a:t>•  Espacio no asignado (unallocated): sectores sin archivo vivo asignado. Característica: fuente de datos borrados y carving.</a:t>
-            </a:r>
-          </a:p>
-          <a:p>
-            <a:pPr>
-              <a:spcAft>
-                <a:spcPts val="600"/>
-              </a:spcAft>
-            </a:pPr>
-            <a:r>
-              <a:rPr sz="1500">
-                <a:solidFill>
-                  <a:srgbClr val="22282E"/>
-                </a:solidFill>
-              </a:rPr>
-              <a:t>•  TRIM en SSD: el disco borra físicamente bloques marcados como libres. Característica: dificulta recuperar borrados en SSD.</a:t>
+              <a:t>•  Adquirir no significa copiar archivos visibles. Una imagen física busca sectores direccionables, espacio no asignado y estructuras; una adquisición lógica obtiene objetos accesibles mediante el…</a:t>
+            </a:r>
+          </a:p>
+          <a:p>
+            <a:pPr>
+              <a:spcAft>
+                <a:spcPts val="600"/>
+              </a:spcAft>
+            </a:pPr>
+            <a:r>
+              <a:rPr sz="1500">
+                <a:solidFill>
+                  <a:srgbClr val="22282E"/>
+                </a:solidFill>
+              </a:rPr>
+              <a:t>•  Apagar puede preservar disco y destruir RAM o claves; mantener encendido altera timestamps. No existe decisión sin impacto, por eso se registra. Un write blocker reduce escrituras en medios…</a:t>
+            </a:r>
+          </a:p>
+          <a:p>
+            <a:pPr>
+              <a:spcAft>
+                <a:spcPts val="600"/>
+              </a:spcAft>
+            </a:pPr>
+            <a:r>
+              <a:rPr sz="1500">
+                <a:solidFill>
+                  <a:srgbClr val="22282E"/>
+                </a:solidFill>
+              </a:rPr>
+              <a:t>•  Si la pregunta exige archivos de usuario accesibles, una adquisición lógica puede ser suficiente y más rápida. Si interesa contenido borrado, estructura o espacio no asignado, se necesita imagen…</a:t>
+            </a:r>
+          </a:p>
+          <a:p>
+            <a:pPr>
+              <a:spcAft>
+                <a:spcPts val="600"/>
+              </a:spcAft>
+            </a:pPr>
+            <a:r>
+              <a:rPr sz="1500">
+                <a:solidFill>
+                  <a:srgbClr val="22282E"/>
+                </a:solidFill>
+              </a:rPr>
+              <a:t>•  Antes se documentan dispositivo, número de serie, conexiones, estado, fecha, reloj y autoridad. En medios apagados se usa write blocker de hardware o software apropiado y se verifica con una prueba…</a:t>
+            </a:r>
+          </a:p>
+          <a:p>
+            <a:pPr>
+              <a:spcAft>
+                <a:spcPts val="600"/>
+              </a:spcAft>
+            </a:pPr>
+            <a:r>
+              <a:rPr sz="1500">
+                <a:solidFill>
+                  <a:srgbClr val="22282E"/>
+                </a:solidFill>
+              </a:rPr>
+              <a:t>•  Raw ofrece una representación sectorial simple; E01 y otros contenedores pueden almacenar metadatos, segmentos, compresión y checks. El formato no garantiza calidad. Se guardan logs con sectores…</a:t>
+            </a:r>
+          </a:p>
+          <a:p>
+            <a:pPr>
+              <a:spcAft>
+                <a:spcPts val="600"/>
+              </a:spcAft>
+            </a:pPr>
+            <a:r>
+              <a:rPr sz="1500">
+                <a:solidFill>
+                  <a:srgbClr val="22282E"/>
+                </a:solidFill>
+              </a:rPr>
+              <a:t>•  El hash de la adquisición se calcula al crear y se verifica antes de analizar o transferir. Hashes internos de bloques pueden ayudar a detectar corrupción en contenedores. El algoritmo y valor se…</a:t>
+            </a:r>
+          </a:p>
+          <a:p>
+            <a:pPr>
+              <a:spcAft>
+                <a:spcPts val="600"/>
+              </a:spcAft>
+            </a:pPr>
+            <a:r>
+              <a:rPr sz="1500">
+                <a:solidFill>
+                  <a:srgbClr val="22282E"/>
+                </a:solidFill>
+              </a:rPr>
+              <a:t>•  Apagar desconecta sesiones y elimina RAM; adquirir en vivo altera memoria y filesystem. Se ponderan cifrado, procesos en memoria, seguridad física, propagación y criticidad. La decisión pertenece al…</a:t>
             </a:r>
           </a:p>
         </p:txBody>
@@ -4271,7 +4962,7 @@
                   <a:srgbClr val="0B3D2E"/>
                 </a:solidFill>
               </a:rPr>
-              <a:t>🧰 Herramientas y preparación</a:t>
+              <a:t>📔 Glosario</a:t>
             </a:r>
           </a:p>
         </p:txBody>
@@ -4309,52 +5000,97 @@
                   <a:srgbClr val="22282E"/>
                 </a:solidFill>
               </a:rPr>
-              <a:t>•  Linux: dd, dcfldd, ewfacquire (paquete libewf-tools), hashdeep.</a:t>
-            </a:r>
-          </a:p>
-          <a:p>
-            <a:pPr>
-              <a:spcAft>
-                <a:spcPts val="600"/>
-              </a:spcAft>
-            </a:pPr>
-            <a:r>
-              <a:rPr sz="1500">
-                <a:solidFill>
-                  <a:srgbClr val="22282E"/>
-                </a:solidFill>
-              </a:rPr>
-              <a:t>•  Windows: FTK Imager (gratuito, de Exterro/AccessData) para crear imágenes E01 con verificación.</a:t>
-            </a:r>
-          </a:p>
-          <a:p>
-            <a:pPr>
-              <a:spcAft>
-                <a:spcPts val="600"/>
-              </a:spcAft>
-            </a:pPr>
-            <a:r>
-              <a:rPr sz="1500">
-                <a:solidFill>
-                  <a:srgbClr val="22282E"/>
-                </a:solidFill>
-              </a:rPr>
-              <a:t>•  Hardware simulado: usa un pendrive propio o un archivo .img como "disco". Nunca practiques sobre medios de terceros sin autorización.</a:t>
-            </a:r>
-          </a:p>
-          <a:p>
-            <a:pPr>
-              <a:spcAft>
-                <a:spcPts val="600"/>
-              </a:spcAft>
-            </a:pPr>
-            <a:r>
-              <a:rPr sz="1500">
-                <a:solidFill>
-                  <a:srgbClr val="22282E"/>
-                </a:solidFill>
-              </a:rPr>
-              <a:t>•  Recuerda: laboratorio aislado, evidencia propia, y bloqueo de escritura siempre que toques un original.</a:t>
+              <a:t>•  Adquisición física: copia de sectores direccionables.</a:t>
+            </a:r>
+          </a:p>
+          <a:p>
+            <a:pPr>
+              <a:spcAft>
+                <a:spcPts val="600"/>
+              </a:spcAft>
+            </a:pPr>
+            <a:r>
+              <a:rPr sz="1500">
+                <a:solidFill>
+                  <a:srgbClr val="22282E"/>
+                </a:solidFill>
+              </a:rPr>
+              <a:t>•  Adquisición lógica: colección mediante archivos o API.</a:t>
+            </a:r>
+          </a:p>
+          <a:p>
+            <a:pPr>
+              <a:spcAft>
+                <a:spcPts val="600"/>
+              </a:spcAft>
+            </a:pPr>
+            <a:r>
+              <a:rPr sz="1500">
+                <a:solidFill>
+                  <a:srgbClr val="22282E"/>
+                </a:solidFill>
+              </a:rPr>
+              <a:t>•  Imagen raw: copia sectorial sin contenedor adicional.</a:t>
+            </a:r>
+          </a:p>
+          <a:p>
+            <a:pPr>
+              <a:spcAft>
+                <a:spcPts val="600"/>
+              </a:spcAft>
+            </a:pPr>
+            <a:r>
+              <a:rPr sz="1500">
+                <a:solidFill>
+                  <a:srgbClr val="22282E"/>
+                </a:solidFill>
+              </a:rPr>
+              <a:t>•  Write blocker: control que impide escrituras al medio.</a:t>
+            </a:r>
+          </a:p>
+          <a:p>
+            <a:pPr>
+              <a:spcAft>
+                <a:spcPts val="600"/>
+              </a:spcAft>
+            </a:pPr>
+            <a:r>
+              <a:rPr sz="1500">
+                <a:solidFill>
+                  <a:srgbClr val="22282E"/>
+                </a:solidFill>
+              </a:rPr>
+              <a:t>•  Bad sector: sector que no pudo leerse de forma fiable.</a:t>
+            </a:r>
+          </a:p>
+          <a:p>
+            <a:pPr>
+              <a:spcAft>
+                <a:spcPts val="600"/>
+              </a:spcAft>
+            </a:pPr>
+            <a:r>
+              <a:rPr sz="1500">
+                <a:solidFill>
+                  <a:srgbClr val="22282E"/>
+                </a:solidFill>
+              </a:rPr>
+              <a:t>•  Live acquisition: recolección con sistema en ejecución.</a:t>
+            </a:r>
+          </a:p>
+          <a:p>
+            <a:pPr>
+              <a:spcAft>
+                <a:spcPts val="600"/>
+              </a:spcAft>
+            </a:pPr>
+            <a:r>
+              <a:rPr sz="1500">
+                <a:solidFill>
+                  <a:srgbClr val="22282E"/>
+                </a:solidFill>
+              </a:rPr>
+              <a:t>•  Verificación: comparación documentada de integridad.</a:t>
             </a:r>
           </a:p>
         </p:txBody>
@@ -4405,7 +5141,7 @@
                   <a:srgbClr val="0B3D2E"/>
                 </a:solidFill>
               </a:rPr>
-              <a:t>🧪 Laboratorio guiado</a:t>
+              <a:t>📖 Definiciones y características</a:t>
             </a:r>
           </a:p>
         </p:txBody>
@@ -4443,97 +5179,97 @@
                   <a:srgbClr val="22282E"/>
                 </a:solidFill>
               </a:rPr>
-              <a:t>•  Identifica el dispositivo (en Linux) sin montarlo:</a:t>
-            </a:r>
-          </a:p>
-          <a:p>
-            <a:pPr>
-              <a:spcAft>
-                <a:spcPts val="600"/>
-              </a:spcAft>
-            </a:pPr>
-            <a:r>
-              <a:rPr sz="1500">
-                <a:solidFill>
-                  <a:srgbClr val="22282E"/>
-                </a:solidFill>
-              </a:rPr>
-              <a:t>•  lsblk -o NAME,SIZE,TYPE,MOUNTPOINT</a:t>
-            </a:r>
-          </a:p>
-          <a:p>
-            <a:pPr>
-              <a:spcAft>
-                <a:spcPts val="600"/>
-              </a:spcAft>
-            </a:pPr>
-            <a:r>
-              <a:rPr sz="1500">
-                <a:solidFill>
-                  <a:srgbClr val="22282E"/>
-                </a:solidFill>
-              </a:rPr>
-              <a:t>•  Monta el original en solo lectura si necesitas inspeccionarlo (simula write-blocker por software):</a:t>
-            </a:r>
-          </a:p>
-          <a:p>
-            <a:pPr>
-              <a:spcAft>
-                <a:spcPts val="600"/>
-              </a:spcAft>
-            </a:pPr>
-            <a:r>
-              <a:rPr sz="1500">
-                <a:solidFill>
-                  <a:srgbClr val="22282E"/>
-                </a:solidFill>
-              </a:rPr>
-              <a:t>•  blockdev --setro /dev/sdX</a:t>
-            </a:r>
-          </a:p>
-          <a:p>
-            <a:pPr>
-              <a:spcAft>
-                <a:spcPts val="600"/>
-              </a:spcAft>
-            </a:pPr>
-            <a:r>
-              <a:rPr sz="1500">
-                <a:solidFill>
-                  <a:srgbClr val="22282E"/>
-                </a:solidFill>
-              </a:rPr>
-              <a:t>•  Adquiere con dcfldd calculando hash al vuelo:</a:t>
-            </a:r>
-          </a:p>
-          <a:p>
-            <a:pPr>
-              <a:spcAft>
-                <a:spcPts val="600"/>
-              </a:spcAft>
-            </a:pPr>
-            <a:r>
-              <a:rPr sz="1500">
-                <a:solidFill>
-                  <a:srgbClr val="22282E"/>
-                </a:solidFill>
-              </a:rPr>
-              <a:t>•  dcfldd if=/dev/sdX of=caso001.dd hash=sha256 hashlog=caso001.hashlog bs=4M</a:t>
-            </a:r>
-          </a:p>
-          <a:p>
-            <a:pPr>
-              <a:spcAft>
-                <a:spcPts val="600"/>
-              </a:spcAft>
-            </a:pPr>
-            <a:r>
-              <a:rPr sz="1500">
-                <a:solidFill>
-                  <a:srgbClr val="22282E"/>
-                </a:solidFill>
-              </a:rPr>
-              <a:t>•  Alternativa en formato forense E01:</a:t>
+              <a:t>•  Adquisición física: copia de sectores direccionables del medio o dispositivo accesible, incluido espacio no asignado. Característica: permite buscar residuos si no fueron sobrescritos, eliminados por…</a:t>
+            </a:r>
+          </a:p>
+          <a:p>
+            <a:pPr>
+              <a:spcAft>
+                <a:spcPts val="600"/>
+              </a:spcAft>
+            </a:pPr>
+            <a:r>
+              <a:rPr sz="1500">
+                <a:solidFill>
+                  <a:srgbClr val="22282E"/>
+                </a:solidFill>
+              </a:rPr>
+              <a:t>•  Adquisición lógica: copia de archivos y estructuras vivas. Característica: más rápida pero omite lo borrado.</a:t>
+            </a:r>
+          </a:p>
+          <a:p>
+            <a:pPr>
+              <a:spcAft>
+                <a:spcPts val="600"/>
+              </a:spcAft>
+            </a:pPr>
+            <a:r>
+              <a:rPr sz="1500">
+                <a:solidFill>
+                  <a:srgbClr val="22282E"/>
+                </a:solidFill>
+              </a:rPr>
+              <a:t>•  Formato RAW (dd): copia cruda sin metadatos. Característica: universal pero sin verificación embebida.</a:t>
+            </a:r>
+          </a:p>
+          <a:p>
+            <a:pPr>
+              <a:spcAft>
+                <a:spcPts val="600"/>
+              </a:spcAft>
+            </a:pPr>
+            <a:r>
+              <a:rPr sz="1500">
+                <a:solidFill>
+                  <a:srgbClr val="22282E"/>
+                </a:solidFill>
+              </a:rPr>
+              <a:t>•  Formato E01 (EWF): contenedor con segmentación, compresión, metadatos y comprobaciones. Característica: sus controles ayudan a detectar corrupción, pero no reemplazan procedimiento ni verificación…</a:t>
+            </a:r>
+          </a:p>
+          <a:p>
+            <a:pPr>
+              <a:spcAft>
+                <a:spcPts val="600"/>
+              </a:spcAft>
+            </a:pPr>
+            <a:r>
+              <a:rPr sz="1500">
+                <a:solidFill>
+                  <a:srgbClr val="22282E"/>
+                </a:solidFill>
+              </a:rPr>
+              <a:t>•  Write blocker: dispositivo o control destinado a impedir escrituras al original. Característica: hardware y software deben seleccionarse y probarse según interfaz y escenario.</a:t>
+            </a:r>
+          </a:p>
+          <a:p>
+            <a:pPr>
+              <a:spcAft>
+                <a:spcPts val="600"/>
+              </a:spcAft>
+            </a:pPr>
+            <a:r>
+              <a:rPr sz="1500">
+                <a:solidFill>
+                  <a:srgbClr val="22282E"/>
+                </a:solidFill>
+              </a:rPr>
+              <a:t>•  Espacio no asignado (unallocated): sectores sin archivo vivo asignado. Característica: fuente de datos borrados y carving.</a:t>
+            </a:r>
+          </a:p>
+          <a:p>
+            <a:pPr>
+              <a:spcAft>
+                <a:spcPts val="600"/>
+              </a:spcAft>
+            </a:pPr>
+            <a:r>
+              <a:rPr sz="1500">
+                <a:solidFill>
+                  <a:srgbClr val="22282E"/>
+                </a:solidFill>
+              </a:rPr>
+              <a:t>•  TRIM en SSD: comando por el que el sistema informa bloques que ya no necesita; el controlador decide cómo y cuándo gestionarlos. Característica: puede reducir o impedir recuperación, sin permitir…</a:t>
             </a:r>
           </a:p>
         </p:txBody>
@@ -4584,7 +5320,7 @@
                   <a:srgbClr val="0B3D2E"/>
                 </a:solidFill>
               </a:rPr>
-              <a:t>✍️ Ejercicios</a:t>
+              <a:t>🔍 Caso razonado — portátil cifrado y SSD</a:t>
             </a:r>
           </a:p>
         </p:txBody>
@@ -4622,82 +5358,22 @@
                   <a:srgbClr val="22282E"/>
                 </a:solidFill>
               </a:rPr>
-              <a:t>•  Explica cuándo elegirías adquisición lógica en vez de física.</a:t>
-            </a:r>
-          </a:p>
-          <a:p>
-            <a:pPr>
-              <a:spcAft>
-                <a:spcPts val="600"/>
-              </a:spcAft>
-            </a:pPr>
-            <a:r>
-              <a:rPr sz="1500">
-                <a:solidFill>
-                  <a:srgbClr val="22282E"/>
-                </a:solidFill>
-              </a:rPr>
-              <a:t>•  Compara RAW y E01 en una tabla de ventajas/desventajas.</a:t>
-            </a:r>
-          </a:p>
-          <a:p>
-            <a:pPr>
-              <a:spcAft>
-                <a:spcPts val="600"/>
-              </a:spcAft>
-            </a:pPr>
-            <a:r>
-              <a:rPr sz="1500">
-                <a:solidFill>
-                  <a:srgbClr val="22282E"/>
-                </a:solidFill>
-              </a:rPr>
-              <a:t>•  Adquiere un pendrive propio en ambos formatos y compara tamaños.</a:t>
-            </a:r>
-          </a:p>
-          <a:p>
-            <a:pPr>
-              <a:spcAft>
-                <a:spcPts val="600"/>
-              </a:spcAft>
-            </a:pPr>
-            <a:r>
-              <a:rPr sz="1500">
-                <a:solidFill>
-                  <a:srgbClr val="22282E"/>
-                </a:solidFill>
-              </a:rPr>
-              <a:t>•  Investiga cómo un write-blocker de hardware difiere de blockdev --setro.</a:t>
-            </a:r>
-          </a:p>
-          <a:p>
-            <a:pPr>
-              <a:spcAft>
-                <a:spcPts val="600"/>
-              </a:spcAft>
-            </a:pPr>
-            <a:r>
-              <a:rPr sz="1500">
-                <a:solidFill>
-                  <a:srgbClr val="22282E"/>
-                </a:solidFill>
-              </a:rPr>
-              <a:t>•  Explica por qué el TRIM de un SSD complica la recuperación de borrados.</a:t>
-            </a:r>
-          </a:p>
-          <a:p>
-            <a:pPr>
-              <a:spcAft>
-                <a:spcPts val="600"/>
-              </a:spcAft>
-            </a:pPr>
-            <a:r>
-              <a:rPr sz="1500">
-                <a:solidFill>
-                  <a:srgbClr val="22282E"/>
-                </a:solidFill>
-              </a:rPr>
-              <a:t>•  Diseña el procedimiento para adquirir un servidor que no se puede apagar.</a:t>
+              <a:t>•  Un portátil corporativo está encendido, desbloqueado y conectado. La pregunta prioritaria es si una cuenta ejecutó una herramienta y extrajo archivos. Apagar puede cerrar el volumen cifrado y perder…</a:t>
+            </a:r>
+          </a:p>
+          <a:p>
+            <a:pPr>
+              <a:spcAft>
+                <a:spcPts val="600"/>
+              </a:spcAft>
+            </a:pPr>
+            <a:r>
+              <a:rPr sz="1500">
+                <a:solidFill>
+                  <a:srgbClr val="22282E"/>
+                </a:solidFill>
+              </a:rPr>
+              <a:t>•  En un SSD, la ausencia de contenido borrado después de TRIM no demuestra que nunca existió. En un E01, metadatos y comprobaciones internas no reemplazan el hash externo ni el log de sectores…</a:t>
             </a:r>
           </a:p>
         </p:txBody>
@@ -4748,7 +5424,7 @@
                   <a:srgbClr val="0B3D2E"/>
                 </a:solidFill>
               </a:rPr>
-              <a:t>📝 Reto verificable</a:t>
+              <a:t>✅ Criterio de dominio</a:t>
             </a:r>
           </a:p>
         </p:txBody>
@@ -4786,22 +5462,7 @@
                   <a:srgbClr val="22282E"/>
                 </a:solidFill>
               </a:rPr>
-              <a:t>•  Adquiere una imagen forense de un pendrive propio en formato E01 con FTK Imager o ewfacquire, y demuestra que la imagen es fiel al original comparando hashes.</a:t>
-            </a:r>
-          </a:p>
-          <a:p>
-            <a:pPr>
-              <a:spcAft>
-                <a:spcPts val="600"/>
-              </a:spcAft>
-            </a:pPr>
-            <a:r>
-              <a:rPr sz="1500">
-                <a:solidFill>
-                  <a:srgbClr val="22282E"/>
-                </a:solidFill>
-              </a:rPr>
-              <a:t>•  Criterio de aceptación: entregas la imagen E01, el log de adquisición y la salida de ewfverify (o el reporte de FTK) mostrando que el hash de adquisición coincide con el de verificación. La cadena de custodia acompaña el entregable.</a:t>
+              <a:t>•  El alumno compara adquisición física, lógica y en vivo contra una pregunta concreta; documenta formato, herramienta, versión, dispositivo, write blocker, hashes y errores; y explica el impacto de…</a:t>
             </a:r>
           </a:p>
         </p:txBody>
